--- a/きょうもごはん。.pptx
+++ b/きょうもごはん。.pptx
@@ -243,7 +243,7 @@
           <a:p>
             <a:fld id="{58C944D5-2E20-4D2D-80A3-00FCE3F2A421}" type="datetimeFigureOut">
               <a:rPr kumimoji="1" lang="ja-JP" altLang="en-US" smtClean="0"/>
-              <a:t>2026/1/20</a:t>
+              <a:t>2026/1/21</a:t>
             </a:fld>
             <a:endParaRPr kumimoji="1" lang="ja-JP" altLang="en-US"/>
           </a:p>
@@ -445,7 +445,7 @@
           <a:p>
             <a:fld id="{58C944D5-2E20-4D2D-80A3-00FCE3F2A421}" type="datetimeFigureOut">
               <a:rPr kumimoji="1" lang="ja-JP" altLang="en-US" smtClean="0"/>
-              <a:t>2026/1/20</a:t>
+              <a:t>2026/1/21</a:t>
             </a:fld>
             <a:endParaRPr kumimoji="1" lang="ja-JP" altLang="en-US"/>
           </a:p>
@@ -657,7 +657,7 @@
           <a:p>
             <a:fld id="{58C944D5-2E20-4D2D-80A3-00FCE3F2A421}" type="datetimeFigureOut">
               <a:rPr kumimoji="1" lang="ja-JP" altLang="en-US" smtClean="0"/>
-              <a:t>2026/1/20</a:t>
+              <a:t>2026/1/21</a:t>
             </a:fld>
             <a:endParaRPr kumimoji="1" lang="ja-JP" altLang="en-US"/>
           </a:p>
@@ -859,7 +859,7 @@
           <a:p>
             <a:fld id="{58C944D5-2E20-4D2D-80A3-00FCE3F2A421}" type="datetimeFigureOut">
               <a:rPr kumimoji="1" lang="ja-JP" altLang="en-US" smtClean="0"/>
-              <a:t>2026/1/20</a:t>
+              <a:t>2026/1/21</a:t>
             </a:fld>
             <a:endParaRPr kumimoji="1" lang="ja-JP" altLang="en-US"/>
           </a:p>
@@ -1105,7 +1105,7 @@
           <a:p>
             <a:fld id="{58C944D5-2E20-4D2D-80A3-00FCE3F2A421}" type="datetimeFigureOut">
               <a:rPr kumimoji="1" lang="ja-JP" altLang="en-US" smtClean="0"/>
-              <a:t>2026/1/20</a:t>
+              <a:t>2026/1/21</a:t>
             </a:fld>
             <a:endParaRPr kumimoji="1" lang="ja-JP" altLang="en-US"/>
           </a:p>
@@ -1401,7 +1401,7 @@
           <a:p>
             <a:fld id="{58C944D5-2E20-4D2D-80A3-00FCE3F2A421}" type="datetimeFigureOut">
               <a:rPr kumimoji="1" lang="ja-JP" altLang="en-US" smtClean="0"/>
-              <a:t>2026/1/20</a:t>
+              <a:t>2026/1/21</a:t>
             </a:fld>
             <a:endParaRPr kumimoji="1" lang="ja-JP" altLang="en-US"/>
           </a:p>
@@ -1832,7 +1832,7 @@
           <a:p>
             <a:fld id="{58C944D5-2E20-4D2D-80A3-00FCE3F2A421}" type="datetimeFigureOut">
               <a:rPr kumimoji="1" lang="ja-JP" altLang="en-US" smtClean="0"/>
-              <a:t>2026/1/20</a:t>
+              <a:t>2026/1/21</a:t>
             </a:fld>
             <a:endParaRPr kumimoji="1" lang="ja-JP" altLang="en-US"/>
           </a:p>
@@ -1950,7 +1950,7 @@
           <a:p>
             <a:fld id="{58C944D5-2E20-4D2D-80A3-00FCE3F2A421}" type="datetimeFigureOut">
               <a:rPr kumimoji="1" lang="ja-JP" altLang="en-US" smtClean="0"/>
-              <a:t>2026/1/20</a:t>
+              <a:t>2026/1/21</a:t>
             </a:fld>
             <a:endParaRPr kumimoji="1" lang="ja-JP" altLang="en-US"/>
           </a:p>
@@ -2045,7 +2045,7 @@
           <a:p>
             <a:fld id="{58C944D5-2E20-4D2D-80A3-00FCE3F2A421}" type="datetimeFigureOut">
               <a:rPr kumimoji="1" lang="ja-JP" altLang="en-US" smtClean="0"/>
-              <a:t>2026/1/20</a:t>
+              <a:t>2026/1/21</a:t>
             </a:fld>
             <a:endParaRPr kumimoji="1" lang="ja-JP" altLang="en-US"/>
           </a:p>
@@ -2354,7 +2354,7 @@
           <a:p>
             <a:fld id="{58C944D5-2E20-4D2D-80A3-00FCE3F2A421}" type="datetimeFigureOut">
               <a:rPr kumimoji="1" lang="ja-JP" altLang="en-US" smtClean="0"/>
-              <a:t>2026/1/20</a:t>
+              <a:t>2026/1/21</a:t>
             </a:fld>
             <a:endParaRPr kumimoji="1" lang="ja-JP" altLang="en-US"/>
           </a:p>
@@ -2607,7 +2607,7 @@
           <a:p>
             <a:fld id="{58C944D5-2E20-4D2D-80A3-00FCE3F2A421}" type="datetimeFigureOut">
               <a:rPr kumimoji="1" lang="ja-JP" altLang="en-US" smtClean="0"/>
-              <a:t>2026/1/20</a:t>
+              <a:t>2026/1/21</a:t>
             </a:fld>
             <a:endParaRPr kumimoji="1" lang="ja-JP" altLang="en-US"/>
           </a:p>
@@ -2852,7 +2852,7 @@
           <a:p>
             <a:fld id="{58C944D5-2E20-4D2D-80A3-00FCE3F2A421}" type="datetimeFigureOut">
               <a:rPr kumimoji="1" lang="ja-JP" altLang="en-US" smtClean="0"/>
-              <a:t>2026/1/20</a:t>
+              <a:t>2026/1/21</a:t>
             </a:fld>
             <a:endParaRPr kumimoji="1" lang="ja-JP" altLang="en-US"/>
           </a:p>
@@ -3354,19 +3354,7 @@
             <a:p>
               <a:r>
                 <a:rPr kumimoji="1" lang="ja-JP" altLang="en-US" sz="2000" dirty="0" smtClean="0"/>
-                <a:t>左</a:t>
-              </a:r>
-              <a:r>
-                <a:rPr kumimoji="1" lang="ja-JP" altLang="en-US" sz="2000" dirty="0" smtClean="0"/>
-                <a:t>クリック長押し：</a:t>
-              </a:r>
-              <a:r>
-                <a:rPr kumimoji="1" lang="ja-JP" altLang="en-US" sz="2000" dirty="0" smtClean="0"/>
-                <a:t>ご飯</a:t>
-              </a:r>
-              <a:r>
-                <a:rPr kumimoji="1" lang="ja-JP" altLang="en-US" sz="2000" dirty="0" smtClean="0"/>
-                <a:t>を落とす</a:t>
+                <a:t>左クリック長押し：ご飯を落とす</a:t>
               </a:r>
               <a:endParaRPr kumimoji="1" lang="ja-JP" altLang="en-US" sz="2000" dirty="0"/>
             </a:p>
@@ -3400,15 +3388,7 @@
               </a:r>
               <a:r>
                 <a:rPr kumimoji="1" lang="ja-JP" altLang="en-US" sz="2000" dirty="0" smtClean="0"/>
-                <a:t>クリック　　　：</a:t>
-              </a:r>
-              <a:r>
-                <a:rPr kumimoji="1" lang="ja-JP" altLang="en-US" sz="2000" dirty="0" smtClean="0"/>
-                <a:t>ご飯を</a:t>
-              </a:r>
-              <a:r>
-                <a:rPr kumimoji="1" lang="ja-JP" altLang="en-US" sz="2000" dirty="0" smtClean="0"/>
-                <a:t>補充</a:t>
+                <a:t>クリック　　　：ご飯を補充</a:t>
               </a:r>
               <a:endParaRPr kumimoji="1" lang="ja-JP" altLang="en-US" sz="2000" dirty="0"/>
             </a:p>
@@ -3487,11 +3467,7 @@
             <a:p>
               <a:r>
                 <a:rPr kumimoji="1" lang="ja-JP" altLang="en-US" sz="2000" dirty="0" smtClean="0"/>
-                <a:t>左</a:t>
-              </a:r>
-              <a:r>
-                <a:rPr kumimoji="1" lang="ja-JP" altLang="en-US" sz="2000" dirty="0" smtClean="0"/>
-                <a:t>クリック離す　：ご飯</a:t>
+                <a:t>左クリック離す　：ご飯</a:t>
               </a:r>
               <a:r>
                 <a:rPr lang="ja-JP" altLang="en-US" sz="2000" dirty="0"/>
@@ -4208,6 +4184,206 @@
           </a:p>
         </p:txBody>
       </p:sp>
+      <p:sp>
+        <p:nvSpPr>
+          <p:cNvPr id="2" name="正方形/長方形 1"/>
+          <p:cNvSpPr/>
+          <p:nvPr/>
+        </p:nvSpPr>
+        <p:spPr>
+          <a:xfrm>
+            <a:off x="8006236" y="1936865"/>
+            <a:ext cx="3839400" cy="2202873"/>
+          </a:xfrm>
+          <a:prstGeom prst="rect">
+            <a:avLst/>
+          </a:prstGeom>
+          <a:noFill/>
+          <a:ln>
+            <a:solidFill>
+              <a:schemeClr val="tx1"/>
+            </a:solidFill>
+          </a:ln>
+        </p:spPr>
+        <p:style>
+          <a:lnRef idx="2">
+            <a:schemeClr val="accent1">
+              <a:shade val="50000"/>
+            </a:schemeClr>
+          </a:lnRef>
+          <a:fillRef idx="1">
+            <a:schemeClr val="accent1"/>
+          </a:fillRef>
+          <a:effectRef idx="0">
+            <a:schemeClr val="accent1"/>
+          </a:effectRef>
+          <a:fontRef idx="minor">
+            <a:schemeClr val="lt1"/>
+          </a:fontRef>
+        </p:style>
+        <p:txBody>
+          <a:bodyPr rtlCol="0" anchor="ctr"/>
+          <a:lstStyle/>
+          <a:p>
+            <a:pPr algn="ctr"/>
+            <a:r>
+              <a:rPr kumimoji="1" lang="ja-JP" altLang="en-US" dirty="0" smtClean="0">
+                <a:solidFill>
+                  <a:schemeClr val="tx1"/>
+                </a:solidFill>
+              </a:rPr>
+              <a:t>ゲームシーンの</a:t>
+            </a:r>
+            <a:endParaRPr kumimoji="1" lang="en-US" altLang="ja-JP" dirty="0" smtClean="0">
+              <a:solidFill>
+                <a:schemeClr val="tx1"/>
+              </a:solidFill>
+            </a:endParaRPr>
+          </a:p>
+          <a:p>
+            <a:pPr algn="ctr"/>
+            <a:r>
+              <a:rPr lang="ja-JP" altLang="en-US" dirty="0" smtClean="0">
+                <a:solidFill>
+                  <a:schemeClr val="tx1"/>
+                </a:solidFill>
+              </a:rPr>
+              <a:t>スクリーンショット</a:t>
+            </a:r>
+            <a:endParaRPr kumimoji="1" lang="ja-JP" altLang="en-US" dirty="0">
+              <a:solidFill>
+                <a:schemeClr val="tx1"/>
+              </a:solidFill>
+            </a:endParaRPr>
+          </a:p>
+        </p:txBody>
+      </p:sp>
+      <p:grpSp>
+        <p:nvGrpSpPr>
+          <p:cNvPr id="7" name="グループ化 6"/>
+          <p:cNvGrpSpPr/>
+          <p:nvPr/>
+        </p:nvGrpSpPr>
+        <p:grpSpPr>
+          <a:xfrm>
+            <a:off x="877422" y="5358293"/>
+            <a:ext cx="5211683" cy="978900"/>
+            <a:chOff x="631766" y="5178829"/>
+            <a:chExt cx="5211683" cy="978900"/>
+          </a:xfrm>
+          <a:effectLst>
+            <a:outerShdw blurRad="50800" dist="38100" dir="2700000" algn="tl" rotWithShape="0">
+              <a:prstClr val="black">
+                <a:alpha val="40000"/>
+              </a:prstClr>
+            </a:outerShdw>
+          </a:effectLst>
+        </p:grpSpPr>
+        <p:sp>
+          <p:nvSpPr>
+            <p:cNvPr id="5" name="テキスト ボックス 4"/>
+            <p:cNvSpPr txBox="1"/>
+            <p:nvPr/>
+          </p:nvSpPr>
+          <p:spPr>
+            <a:xfrm>
+              <a:off x="631767" y="5178829"/>
+              <a:ext cx="3057247" cy="523220"/>
+            </a:xfrm>
+            <a:prstGeom prst="rect">
+              <a:avLst/>
+            </a:prstGeom>
+            <a:noFill/>
+          </p:spPr>
+          <p:txBody>
+            <a:bodyPr wrap="none" rtlCol="0">
+              <a:spAutoFit/>
+            </a:bodyPr>
+            <a:lstStyle/>
+            <a:p>
+              <a:r>
+                <a:rPr kumimoji="1" lang="ja-JP" altLang="en-US" sz="2800" dirty="0" smtClean="0">
+                  <a:effectLst>
+                    <a:outerShdw blurRad="38100" dist="38100" dir="2700000" algn="tl">
+                      <a:srgbClr val="000000">
+                        <a:alpha val="43137"/>
+                      </a:srgbClr>
+                    </a:outerShdw>
+                  </a:effectLst>
+                </a:rPr>
+                <a:t>ねこたちの反応が</a:t>
+              </a:r>
+              <a:endParaRPr kumimoji="1" lang="ja-JP" altLang="en-US" sz="2800" dirty="0">
+                <a:effectLst>
+                  <a:outerShdw blurRad="38100" dist="38100" dir="2700000" algn="tl">
+                    <a:srgbClr val="000000">
+                      <a:alpha val="43137"/>
+                    </a:srgbClr>
+                  </a:outerShdw>
+                </a:effectLst>
+              </a:endParaRPr>
+            </a:p>
+          </p:txBody>
+        </p:sp>
+        <p:sp>
+          <p:nvSpPr>
+            <p:cNvPr id="29" name="テキスト ボックス 28"/>
+            <p:cNvSpPr txBox="1"/>
+            <p:nvPr/>
+          </p:nvSpPr>
+          <p:spPr>
+            <a:xfrm>
+              <a:off x="631766" y="5634509"/>
+              <a:ext cx="5211683" cy="523220"/>
+            </a:xfrm>
+            <a:prstGeom prst="rect">
+              <a:avLst/>
+            </a:prstGeom>
+            <a:noFill/>
+          </p:spPr>
+          <p:txBody>
+            <a:bodyPr wrap="none" rtlCol="0">
+              <a:spAutoFit/>
+            </a:bodyPr>
+            <a:lstStyle/>
+            <a:p>
+              <a:r>
+                <a:rPr lang="ja-JP" altLang="en-US" sz="2800" dirty="0" smtClean="0">
+                  <a:effectLst>
+                    <a:outerShdw blurRad="38100" dist="38100" dir="2700000" algn="tl">
+                      <a:srgbClr val="000000">
+                        <a:alpha val="43137"/>
+                      </a:srgbClr>
+                    </a:outerShdw>
+                  </a:effectLst>
+                </a:rPr>
+                <a:t>きょう</a:t>
+              </a:r>
+              <a:r>
+                <a:rPr kumimoji="1" lang="ja-JP" altLang="en-US" sz="2800" dirty="0" smtClean="0">
+                  <a:effectLst>
+                    <a:outerShdw blurRad="38100" dist="38100" dir="2700000" algn="tl">
+                      <a:srgbClr val="000000">
+                        <a:alpha val="43137"/>
+                      </a:srgbClr>
+                    </a:outerShdw>
+                  </a:effectLst>
+                </a:rPr>
+                <a:t>の「評価」につながる。</a:t>
+              </a:r>
+              <a:endParaRPr kumimoji="1" lang="ja-JP" altLang="en-US" sz="2800" dirty="0">
+                <a:effectLst>
+                  <a:outerShdw blurRad="38100" dist="38100" dir="2700000" algn="tl">
+                    <a:srgbClr val="000000">
+                      <a:alpha val="43137"/>
+                    </a:srgbClr>
+                  </a:outerShdw>
+                </a:effectLst>
+              </a:endParaRPr>
+            </a:p>
+          </p:txBody>
+        </p:sp>
+      </p:grpSp>
     </p:spTree>
     <p:extLst>
       <p:ext uri="{BB962C8B-B14F-4D97-AF65-F5344CB8AC3E}">

--- a/きょうもごはん。.pptx
+++ b/きょうもごはん。.pptx
@@ -243,7 +243,7 @@
           <a:p>
             <a:fld id="{58C944D5-2E20-4D2D-80A3-00FCE3F2A421}" type="datetimeFigureOut">
               <a:rPr kumimoji="1" lang="ja-JP" altLang="en-US" smtClean="0"/>
-              <a:t>2026/1/21</a:t>
+              <a:t>2026/1/30</a:t>
             </a:fld>
             <a:endParaRPr kumimoji="1" lang="ja-JP" altLang="en-US"/>
           </a:p>
@@ -445,7 +445,7 @@
           <a:p>
             <a:fld id="{58C944D5-2E20-4D2D-80A3-00FCE3F2A421}" type="datetimeFigureOut">
               <a:rPr kumimoji="1" lang="ja-JP" altLang="en-US" smtClean="0"/>
-              <a:t>2026/1/21</a:t>
+              <a:t>2026/1/30</a:t>
             </a:fld>
             <a:endParaRPr kumimoji="1" lang="ja-JP" altLang="en-US"/>
           </a:p>
@@ -657,7 +657,7 @@
           <a:p>
             <a:fld id="{58C944D5-2E20-4D2D-80A3-00FCE3F2A421}" type="datetimeFigureOut">
               <a:rPr kumimoji="1" lang="ja-JP" altLang="en-US" smtClean="0"/>
-              <a:t>2026/1/21</a:t>
+              <a:t>2026/1/30</a:t>
             </a:fld>
             <a:endParaRPr kumimoji="1" lang="ja-JP" altLang="en-US"/>
           </a:p>
@@ -859,7 +859,7 @@
           <a:p>
             <a:fld id="{58C944D5-2E20-4D2D-80A3-00FCE3F2A421}" type="datetimeFigureOut">
               <a:rPr kumimoji="1" lang="ja-JP" altLang="en-US" smtClean="0"/>
-              <a:t>2026/1/21</a:t>
+              <a:t>2026/1/30</a:t>
             </a:fld>
             <a:endParaRPr kumimoji="1" lang="ja-JP" altLang="en-US"/>
           </a:p>
@@ -1105,7 +1105,7 @@
           <a:p>
             <a:fld id="{58C944D5-2E20-4D2D-80A3-00FCE3F2A421}" type="datetimeFigureOut">
               <a:rPr kumimoji="1" lang="ja-JP" altLang="en-US" smtClean="0"/>
-              <a:t>2026/1/21</a:t>
+              <a:t>2026/1/30</a:t>
             </a:fld>
             <a:endParaRPr kumimoji="1" lang="ja-JP" altLang="en-US"/>
           </a:p>
@@ -1401,7 +1401,7 @@
           <a:p>
             <a:fld id="{58C944D5-2E20-4D2D-80A3-00FCE3F2A421}" type="datetimeFigureOut">
               <a:rPr kumimoji="1" lang="ja-JP" altLang="en-US" smtClean="0"/>
-              <a:t>2026/1/21</a:t>
+              <a:t>2026/1/30</a:t>
             </a:fld>
             <a:endParaRPr kumimoji="1" lang="ja-JP" altLang="en-US"/>
           </a:p>
@@ -1832,7 +1832,7 @@
           <a:p>
             <a:fld id="{58C944D5-2E20-4D2D-80A3-00FCE3F2A421}" type="datetimeFigureOut">
               <a:rPr kumimoji="1" lang="ja-JP" altLang="en-US" smtClean="0"/>
-              <a:t>2026/1/21</a:t>
+              <a:t>2026/1/30</a:t>
             </a:fld>
             <a:endParaRPr kumimoji="1" lang="ja-JP" altLang="en-US"/>
           </a:p>
@@ -1950,7 +1950,7 @@
           <a:p>
             <a:fld id="{58C944D5-2E20-4D2D-80A3-00FCE3F2A421}" type="datetimeFigureOut">
               <a:rPr kumimoji="1" lang="ja-JP" altLang="en-US" smtClean="0"/>
-              <a:t>2026/1/21</a:t>
+              <a:t>2026/1/30</a:t>
             </a:fld>
             <a:endParaRPr kumimoji="1" lang="ja-JP" altLang="en-US"/>
           </a:p>
@@ -2045,7 +2045,7 @@
           <a:p>
             <a:fld id="{58C944D5-2E20-4D2D-80A3-00FCE3F2A421}" type="datetimeFigureOut">
               <a:rPr kumimoji="1" lang="ja-JP" altLang="en-US" smtClean="0"/>
-              <a:t>2026/1/21</a:t>
+              <a:t>2026/1/30</a:t>
             </a:fld>
             <a:endParaRPr kumimoji="1" lang="ja-JP" altLang="en-US"/>
           </a:p>
@@ -2354,7 +2354,7 @@
           <a:p>
             <a:fld id="{58C944D5-2E20-4D2D-80A3-00FCE3F2A421}" type="datetimeFigureOut">
               <a:rPr kumimoji="1" lang="ja-JP" altLang="en-US" smtClean="0"/>
-              <a:t>2026/1/21</a:t>
+              <a:t>2026/1/30</a:t>
             </a:fld>
             <a:endParaRPr kumimoji="1" lang="ja-JP" altLang="en-US"/>
           </a:p>
@@ -2607,7 +2607,7 @@
           <a:p>
             <a:fld id="{58C944D5-2E20-4D2D-80A3-00FCE3F2A421}" type="datetimeFigureOut">
               <a:rPr kumimoji="1" lang="ja-JP" altLang="en-US" smtClean="0"/>
-              <a:t>2026/1/21</a:t>
+              <a:t>2026/1/30</a:t>
             </a:fld>
             <a:endParaRPr kumimoji="1" lang="ja-JP" altLang="en-US"/>
           </a:p>
@@ -2852,7 +2852,7 @@
           <a:p>
             <a:fld id="{58C944D5-2E20-4D2D-80A3-00FCE3F2A421}" type="datetimeFigureOut">
               <a:rPr kumimoji="1" lang="ja-JP" altLang="en-US" smtClean="0"/>
-              <a:t>2026/1/21</a:t>
+              <a:t>2026/1/30</a:t>
             </a:fld>
             <a:endParaRPr kumimoji="1" lang="ja-JP" altLang="en-US"/>
           </a:p>
@@ -4184,80 +4184,6 @@
           </a:p>
         </p:txBody>
       </p:sp>
-      <p:sp>
-        <p:nvSpPr>
-          <p:cNvPr id="2" name="正方形/長方形 1"/>
-          <p:cNvSpPr/>
-          <p:nvPr/>
-        </p:nvSpPr>
-        <p:spPr>
-          <a:xfrm>
-            <a:off x="8006236" y="1936865"/>
-            <a:ext cx="3839400" cy="2202873"/>
-          </a:xfrm>
-          <a:prstGeom prst="rect">
-            <a:avLst/>
-          </a:prstGeom>
-          <a:noFill/>
-          <a:ln>
-            <a:solidFill>
-              <a:schemeClr val="tx1"/>
-            </a:solidFill>
-          </a:ln>
-        </p:spPr>
-        <p:style>
-          <a:lnRef idx="2">
-            <a:schemeClr val="accent1">
-              <a:shade val="50000"/>
-            </a:schemeClr>
-          </a:lnRef>
-          <a:fillRef idx="1">
-            <a:schemeClr val="accent1"/>
-          </a:fillRef>
-          <a:effectRef idx="0">
-            <a:schemeClr val="accent1"/>
-          </a:effectRef>
-          <a:fontRef idx="minor">
-            <a:schemeClr val="lt1"/>
-          </a:fontRef>
-        </p:style>
-        <p:txBody>
-          <a:bodyPr rtlCol="0" anchor="ctr"/>
-          <a:lstStyle/>
-          <a:p>
-            <a:pPr algn="ctr"/>
-            <a:r>
-              <a:rPr kumimoji="1" lang="ja-JP" altLang="en-US" dirty="0" smtClean="0">
-                <a:solidFill>
-                  <a:schemeClr val="tx1"/>
-                </a:solidFill>
-              </a:rPr>
-              <a:t>ゲームシーンの</a:t>
-            </a:r>
-            <a:endParaRPr kumimoji="1" lang="en-US" altLang="ja-JP" dirty="0" smtClean="0">
-              <a:solidFill>
-                <a:schemeClr val="tx1"/>
-              </a:solidFill>
-            </a:endParaRPr>
-          </a:p>
-          <a:p>
-            <a:pPr algn="ctr"/>
-            <a:r>
-              <a:rPr lang="ja-JP" altLang="en-US" dirty="0" smtClean="0">
-                <a:solidFill>
-                  <a:schemeClr val="tx1"/>
-                </a:solidFill>
-              </a:rPr>
-              <a:t>スクリーンショット</a:t>
-            </a:r>
-            <a:endParaRPr kumimoji="1" lang="ja-JP" altLang="en-US" dirty="0">
-              <a:solidFill>
-                <a:schemeClr val="tx1"/>
-              </a:solidFill>
-            </a:endParaRPr>
-          </a:p>
-        </p:txBody>
-      </p:sp>
       <p:grpSp>
         <p:nvGrpSpPr>
           <p:cNvPr id="7" name="グループ化 6"/>
@@ -4384,6 +4310,43 @@
           </p:txBody>
         </p:sp>
       </p:grpSp>
+      <p:pic>
+        <p:nvPicPr>
+          <p:cNvPr id="10" name="図 9"/>
+          <p:cNvPicPr>
+            <a:picLocks noChangeAspect="1"/>
+          </p:cNvPicPr>
+          <p:nvPr/>
+        </p:nvPicPr>
+        <p:blipFill rotWithShape="1">
+          <a:blip r:embed="rId6" cstate="print">
+            <a:extLst>
+              <a:ext uri="{28A0092B-C50C-407E-A947-70E740481C1C}">
+                <a14:useLocalDpi xmlns:a14="http://schemas.microsoft.com/office/drawing/2010/main" val="0"/>
+              </a:ext>
+            </a:extLst>
+          </a:blip>
+          <a:srcRect l="346" r="173" b="549"/>
+          <a:stretch/>
+        </p:blipFill>
+        <p:spPr>
+          <a:xfrm>
+            <a:off x="7521706" y="1695941"/>
+            <a:ext cx="4470922" cy="2496280"/>
+          </a:xfrm>
+          <a:prstGeom prst="rect">
+            <a:avLst/>
+          </a:prstGeom>
+          <a:ln w="57150">
+            <a:solidFill>
+              <a:schemeClr val="tx1">
+                <a:lumMod val="50000"/>
+                <a:lumOff val="50000"/>
+              </a:schemeClr>
+            </a:solidFill>
+          </a:ln>
+        </p:spPr>
+      </p:pic>
     </p:spTree>
     <p:extLst>
       <p:ext uri="{BB962C8B-B14F-4D97-AF65-F5344CB8AC3E}">
